--- a/lectures/lecture01.pptx
+++ b/lectures/lecture01.pptx
@@ -3953,48 +3953,9 @@
           </a:p>
         </p:txBody>
       </p:sp>
-      <p:sp>
-        <p:nvSpPr>
-          <p:cNvPr id="4" name="TextBox 3"/>
-          <p:cNvSpPr txBox="1"/>
-          <p:nvPr/>
-        </p:nvSpPr>
-        <p:spPr>
-          <a:xfrm>
-            <a:off x="777240" y="1463040"/>
-            <a:ext cx="10637215" cy="548640"/>
-          </a:xfrm>
-          <a:prstGeom prst="rect">
-            <a:avLst/>
-          </a:prstGeom>
-          <a:noFill/>
-        </p:spPr>
-        <p:txBody>
-          <a:bodyPr wrap="square" lIns="0" rIns="0" tIns="0" bIns="0">
-            <a:spAutoFit/>
-          </a:bodyPr>
-          <a:lstStyle/>
-          <a:p>
-            <a:pPr algn="l">
-              <a:lnSpc>
-                <a:spcPct val="120000"/>
-              </a:lnSpc>
-            </a:pPr>
-            <a:r>
-              <a:rPr sz="2000" b="0" i="0">
-                <a:solidFill>
-                  <a:srgbClr val="6B7484"/>
-                </a:solidFill>
-                <a:latin typeface="Arial"/>
-              </a:rPr>
-              <a:t>В «Берсерке» тот же вопрос: судьбу вершит человек — или всё предопределено?</a:t>
-            </a:r>
-          </a:p>
-        </p:txBody>
-      </p:sp>
       <p:pic>
         <p:nvPicPr>
-          <p:cNvPr id="5" name="Picture 4" descr="guts_fate.png"/>
+          <p:cNvPr id="4" name="Picture 3" descr="guts_fate.png"/>
           <p:cNvPicPr>
             <a:picLocks noChangeAspect="1"/>
           </p:cNvPicPr>
@@ -4008,14 +3969,53 @@
         </p:blipFill>
         <p:spPr>
           <a:xfrm>
-            <a:off x="4003389" y="2048256"/>
-            <a:ext cx="4184917" cy="3479800"/>
+            <a:off x="4464374" y="1572768"/>
+            <a:ext cx="3262947" cy="3955288"/>
           </a:xfrm>
           <a:prstGeom prst="rect">
             <a:avLst/>
           </a:prstGeom>
         </p:spPr>
       </p:pic>
+      <p:sp>
+        <p:nvSpPr>
+          <p:cNvPr id="5" name="TextBox 4"/>
+          <p:cNvSpPr txBox="1"/>
+          <p:nvPr/>
+        </p:nvSpPr>
+        <p:spPr>
+          <a:xfrm>
+            <a:off x="777240" y="5729224"/>
+            <a:ext cx="10637215" cy="827024"/>
+          </a:xfrm>
+          <a:prstGeom prst="rect">
+            <a:avLst/>
+          </a:prstGeom>
+          <a:noFill/>
+        </p:spPr>
+        <p:txBody>
+          <a:bodyPr wrap="square" lIns="0" rIns="0" tIns="0" bIns="0">
+            <a:spAutoFit/>
+          </a:bodyPr>
+          <a:lstStyle/>
+          <a:p>
+            <a:pPr algn="l">
+              <a:lnSpc>
+                <a:spcPct val="125000"/>
+              </a:lnSpc>
+            </a:pPr>
+            <a:r>
+              <a:rPr sz="1600" b="0" i="0">
+                <a:solidFill>
+                  <a:srgbClr val="6B7484"/>
+                </a:solidFill>
+                <a:latin typeface="Arial"/>
+              </a:rPr>
+              <a:t>Прошлое человека — история платежей, доход, долги — говорит о будущем многое, но не всё. Поэтому модель отвечает не «вернёт» или «не вернёт», а вероятностью.</a:t>
+            </a:r>
+          </a:p>
+        </p:txBody>
+      </p:sp>
       <p:sp>
         <p:nvSpPr>
           <p:cNvPr id="6" name="TextBox 5"/>
@@ -4024,8 +4024,8 @@
         </p:nvSpPr>
         <p:spPr>
           <a:xfrm>
-            <a:off x="777240" y="5729224"/>
-            <a:ext cx="10637215" cy="827024"/>
+            <a:off x="777240" y="6382512"/>
+            <a:ext cx="6382329" cy="274320"/>
           </a:xfrm>
           <a:prstGeom prst="rect">
             <a:avLst/>
@@ -4038,19 +4038,15 @@
           </a:bodyPr>
           <a:lstStyle/>
           <a:p>
-            <a:pPr algn="l">
-              <a:lnSpc>
-                <a:spcPct val="125000"/>
-              </a:lnSpc>
-            </a:pPr>
-            <a:r>
-              <a:rPr sz="1600" b="0" i="0">
-                <a:solidFill>
-                  <a:srgbClr val="6B7484"/>
-                </a:solidFill>
-                <a:latin typeface="Arial"/>
-              </a:rPr>
-              <a:t>Гатс дерётся с предопределённостью, Гриффит принимает её как закон причинности. Модель стоит посередине: будущее выводится из прошлого, но не полностью — поэтому ответ всегда вероятность.</a:t>
+            <a:pPr algn="l"/>
+            <a:r>
+              <a:rPr sz="1200" b="0" i="0">
+                <a:solidFill>
+                  <a:srgbClr val="A8B0BC"/>
+                </a:solidFill>
+                <a:latin typeface="Arial"/>
+              </a:rPr>
+              <a:t>Машинное обучение · Лекция 1. Введение</a:t>
             </a:r>
           </a:p>
         </p:txBody>
@@ -4058,41 +4054,6 @@
       <p:sp>
         <p:nvSpPr>
           <p:cNvPr id="7" name="TextBox 6"/>
-          <p:cNvSpPr txBox="1"/>
-          <p:nvPr/>
-        </p:nvSpPr>
-        <p:spPr>
-          <a:xfrm>
-            <a:off x="777240" y="6382512"/>
-            <a:ext cx="6382329" cy="274320"/>
-          </a:xfrm>
-          <a:prstGeom prst="rect">
-            <a:avLst/>
-          </a:prstGeom>
-          <a:noFill/>
-        </p:spPr>
-        <p:txBody>
-          <a:bodyPr wrap="square" lIns="0" rIns="0" tIns="0" bIns="0">
-            <a:spAutoFit/>
-          </a:bodyPr>
-          <a:lstStyle/>
-          <a:p>
-            <a:pPr algn="l"/>
-            <a:r>
-              <a:rPr sz="1200" b="0" i="0">
-                <a:solidFill>
-                  <a:srgbClr val="A8B0BC"/>
-                </a:solidFill>
-                <a:latin typeface="Arial"/>
-              </a:rPr>
-              <a:t>Машинное обучение · Лекция 1. Введение</a:t>
-            </a:r>
-          </a:p>
-        </p:txBody>
-      </p:sp>
-      <p:sp>
-        <p:nvSpPr>
-          <p:cNvPr id="8" name="TextBox 7"/>
           <p:cNvSpPr txBox="1"/>
           <p:nvPr/>
         </p:nvSpPr>

--- a/lectures/lecture01.pptx
+++ b/lectures/lecture01.pptx
@@ -8313,52 +8313,13 @@
       </p:sp>
       <p:sp>
         <p:nvSpPr>
-          <p:cNvPr id="4" name="TextBox 3"/>
-          <p:cNvSpPr txBox="1"/>
-          <p:nvPr/>
-        </p:nvSpPr>
-        <p:spPr>
-          <a:xfrm>
-            <a:off x="777240" y="1463040"/>
-            <a:ext cx="10637215" cy="548640"/>
-          </a:xfrm>
-          <a:prstGeom prst="rect">
-            <a:avLst/>
-          </a:prstGeom>
-          <a:noFill/>
-        </p:spPr>
-        <p:txBody>
-          <a:bodyPr wrap="square" lIns="0" rIns="0" tIns="0" bIns="0">
-            <a:spAutoFit/>
-          </a:bodyPr>
-          <a:lstStyle/>
-          <a:p>
-            <a:pPr algn="l">
-              <a:lnSpc>
-                <a:spcPct val="120000"/>
-              </a:lnSpc>
-            </a:pPr>
-            <a:r>
-              <a:rPr sz="2000" b="0" i="0">
-                <a:solidFill>
-                  <a:srgbClr val="6B7484"/>
-                </a:solidFill>
-                <a:latin typeface="Arial"/>
-              </a:rPr>
-              <a:t>Вопрос, который вам зададут на первой же работе</a:t>
-            </a:r>
-          </a:p>
-        </p:txBody>
-      </p:sp>
-      <p:sp>
-        <p:nvSpPr>
-          <p:cNvPr id="5" name="Rounded Rectangle 4"/>
+          <p:cNvPr id="4" name="Rounded Rectangle 3"/>
           <p:cNvSpPr/>
           <p:nvPr/>
         </p:nvSpPr>
         <p:spPr>
           <a:xfrm>
-            <a:off x="777240" y="2048256"/>
+            <a:off x="777240" y="1572768"/>
             <a:ext cx="5112867" cy="3657600"/>
           </a:xfrm>
           <a:prstGeom prst="roundRect">
@@ -8414,7 +8375,7 @@
                 </a:solidFill>
                 <a:latin typeface="Arial"/>
               </a:rPr>
-              <a:t>Табличные данные: клиенты, транзакции, показания датчиков</a:t>
+              <a:t>Табличные данные: клиенты, транзакции</a:t>
             </a:r>
           </a:p>
           <a:p>
@@ -8438,7 +8399,7 @@
                 </a:solidFill>
                 <a:latin typeface="Arial"/>
               </a:rPr>
-              <a:t>Нужна интерпретируемость — объяснить отказ в кредите</a:t>
+              <a:t>Нужна интерпретируемость: объяснить отказ</a:t>
             </a:r>
           </a:p>
           <a:p>
@@ -8486,7 +8447,7 @@
                 </a:solidFill>
                 <a:latin typeface="Arial"/>
               </a:rPr>
-              <a:t>Важны скорость отклика и стоимость инференса</a:t>
+              <a:t>Важны скорость отклика и цена инференса</a:t>
             </a:r>
           </a:p>
           <a:p>
@@ -8510,20 +8471,20 @@
                 </a:solidFill>
                 <a:latin typeface="Arial"/>
               </a:rPr>
-              <a:t>Градиентный бустинг до сих пор бьёт нейросети на таблицах</a:t>
-            </a:r>
-          </a:p>
-        </p:txBody>
-      </p:sp>
-      <p:sp>
-        <p:nvSpPr>
-          <p:cNvPr id="6" name="Rounded Rectangle 5"/>
+              <a:t>Бустинг всё ещё бьёт сети на таблицах</a:t>
+            </a:r>
+          </a:p>
+        </p:txBody>
+      </p:sp>
+      <p:sp>
+        <p:nvSpPr>
+          <p:cNvPr id="5" name="Rounded Rectangle 4"/>
           <p:cNvSpPr/>
           <p:nvPr/>
         </p:nvSpPr>
         <p:spPr>
           <a:xfrm>
-            <a:off x="6301587" y="2048256"/>
+            <a:off x="6301587" y="1572768"/>
             <a:ext cx="5112867" cy="3657600"/>
           </a:xfrm>
           <a:prstGeom prst="roundRect">
@@ -8682,7 +8643,7 @@
       </p:sp>
       <p:sp>
         <p:nvSpPr>
-          <p:cNvPr id="7" name="TextBox 6"/>
+          <p:cNvPr id="6" name="TextBox 5"/>
           <p:cNvSpPr txBox="1"/>
           <p:nvPr/>
         </p:nvSpPr>
@@ -8717,7 +8678,7 @@
       </p:sp>
       <p:sp>
         <p:nvSpPr>
-          <p:cNvPr id="8" name="TextBox 7"/>
+          <p:cNvPr id="7" name="TextBox 6"/>
           <p:cNvSpPr txBox="1"/>
           <p:nvPr/>
         </p:nvSpPr>
